--- a/chapter2/parts/part-04-apis-for-collection/clip.pptx
+++ b/chapter2/parts/part-04-apis-for-collection/clip.pptx
@@ -4172,7 +4172,7 @@
               </a:defRPr>
             </a:pPr>
             <a:r>
-              <a:t>Chapter 2 — 04 Apis For Collection</a:t>
+              <a:t>Chapter 2 — Apis For Collection</a:t>
             </a:r>
           </a:p>
         </p:txBody>
@@ -4331,7 +4331,7 @@
               </a:defRPr>
             </a:pPr>
             <a:r>
-              <a:t>Chapter 2 — 04 Apis For Collection</a:t>
+              <a:t>Chapter 2 — Apis For Collection</a:t>
             </a:r>
           </a:p>
         </p:txBody>
@@ -4490,7 +4490,7 @@
               </a:defRPr>
             </a:pPr>
             <a:r>
-              <a:t>Chapter 2 — 04 Apis For Collection</a:t>
+              <a:t>Chapter 2 — Apis For Collection</a:t>
             </a:r>
           </a:p>
         </p:txBody>
@@ -4669,7 +4669,7 @@
               </a:defRPr>
             </a:pPr>
             <a:r>
-              <a:t>Chapter 2 — 04 Apis For Collection</a:t>
+              <a:t>Chapter 2 — Apis For Collection</a:t>
             </a:r>
           </a:p>
         </p:txBody>
@@ -4848,7 +4848,7 @@
               </a:defRPr>
             </a:pPr>
             <a:r>
-              <a:t>Chapter 2 — 04 Apis For Collection</a:t>
+              <a:t>Chapter 2 — Apis For Collection</a:t>
             </a:r>
           </a:p>
         </p:txBody>
@@ -5067,7 +5067,7 @@
               </a:defRPr>
             </a:pPr>
             <a:r>
-              <a:t>Chapter 2 — 04 Apis For Collection</a:t>
+              <a:t>Chapter 2 — Apis For Collection</a:t>
             </a:r>
           </a:p>
         </p:txBody>
@@ -5378,7 +5378,7 @@
               </a:defRPr>
             </a:pPr>
             <a:r>
-              <a:t>Chapter 2 — 04 Apis For Collection</a:t>
+              <a:t>Chapter 2 — Apis For Collection</a:t>
             </a:r>
           </a:p>
         </p:txBody>
@@ -5577,7 +5577,7 @@
               </a:defRPr>
             </a:pPr>
             <a:r>
-              <a:t>Chapter 2 — 04 Apis For Collection</a:t>
+              <a:t>Chapter 2 — Apis For Collection</a:t>
             </a:r>
           </a:p>
         </p:txBody>
@@ -5756,7 +5756,7 @@
               </a:defRPr>
             </a:pPr>
             <a:r>
-              <a:t>Chapter 2 — 04 Apis For Collection</a:t>
+              <a:t>Chapter 2 — Apis For Collection</a:t>
             </a:r>
           </a:p>
         </p:txBody>
@@ -5935,7 +5935,7 @@
               </a:defRPr>
             </a:pPr>
             <a:r>
-              <a:t>Chapter 2 — 04 Apis For Collection</a:t>
+              <a:t>Chapter 2 — Apis For Collection</a:t>
             </a:r>
           </a:p>
         </p:txBody>

--- a/chapter2/parts/part-04-apis-for-collection/clip.pptx
+++ b/chapter2/parts/part-04-apis-for-collection/clip.pptx
@@ -4256,10 +4256,12 @@
           </a:bodyPr>
           <a:lstStyle/>
           <a:p>
-            <a:pPr>
+            <a:pPr lvl="0" marL="457200" indent="-228600">
+              <a:buFont typeface="Calibri"/>
               <a:spcAft>
                 <a:spcPts val="1000"/>
               </a:spcAft>
+              <a:buSzPct val="100000"/>
               <a:buChar char="•"/>
               <a:lnSpc>
                 <a:spcPts val="2200"/>
@@ -4276,10 +4278,12 @@
             </a:r>
           </a:p>
           <a:p>
-            <a:pPr>
+            <a:pPr lvl="0" marL="457200" indent="-228600">
+              <a:buFont typeface="Calibri"/>
               <a:spcAft>
                 <a:spcPts val="1000"/>
               </a:spcAft>
+              <a:buSzPct val="100000"/>
               <a:buChar char="•"/>
               <a:lnSpc>
                 <a:spcPts val="2200"/>
@@ -4415,10 +4419,12 @@
           </a:bodyPr>
           <a:lstStyle/>
           <a:p>
-            <a:pPr>
+            <a:pPr lvl="0" marL="457200" indent="-228600">
+              <a:buFont typeface="Calibri"/>
               <a:spcAft>
                 <a:spcPts val="1000"/>
               </a:spcAft>
+              <a:buSzPct val="100000"/>
               <a:buChar char="•"/>
               <a:lnSpc>
                 <a:spcPts val="2200"/>
@@ -4435,10 +4441,12 @@
             </a:r>
           </a:p>
           <a:p>
-            <a:pPr>
+            <a:pPr lvl="0" marL="457200" indent="-228600">
+              <a:buFont typeface="Calibri"/>
               <a:spcAft>
                 <a:spcPts val="1000"/>
               </a:spcAft>
+              <a:buSzPct val="100000"/>
               <a:buChar char="•"/>
               <a:lnSpc>
                 <a:spcPts val="2200"/>
@@ -4574,10 +4582,12 @@
           </a:bodyPr>
           <a:lstStyle/>
           <a:p>
-            <a:pPr>
+            <a:pPr lvl="0" marL="457200" indent="-228600">
+              <a:buFont typeface="Calibri"/>
               <a:spcAft>
                 <a:spcPts val="1000"/>
               </a:spcAft>
+              <a:buSzPct val="100000"/>
               <a:buChar char="•"/>
               <a:lnSpc>
                 <a:spcPts val="2200"/>
@@ -4594,10 +4604,12 @@
             </a:r>
           </a:p>
           <a:p>
-            <a:pPr>
+            <a:pPr lvl="0" marL="457200" indent="-228600">
+              <a:buFont typeface="Calibri"/>
               <a:spcAft>
                 <a:spcPts val="1000"/>
               </a:spcAft>
+              <a:buSzPct val="100000"/>
               <a:buChar char="•"/>
               <a:lnSpc>
                 <a:spcPts val="2200"/>
@@ -4614,10 +4626,12 @@
             </a:r>
           </a:p>
           <a:p>
-            <a:pPr>
+            <a:pPr lvl="0" marL="457200" indent="-228600">
+              <a:buFont typeface="Calibri"/>
               <a:spcAft>
                 <a:spcPts val="1000"/>
               </a:spcAft>
+              <a:buSzPct val="100000"/>
               <a:buChar char="•"/>
               <a:lnSpc>
                 <a:spcPts val="2200"/>
@@ -4753,10 +4767,12 @@
           </a:bodyPr>
           <a:lstStyle/>
           <a:p>
-            <a:pPr>
+            <a:pPr lvl="0" marL="457200" indent="-228600">
+              <a:buFont typeface="Calibri"/>
               <a:spcAft>
                 <a:spcPts val="1000"/>
               </a:spcAft>
+              <a:buSzPct val="100000"/>
               <a:buChar char="•"/>
               <a:lnSpc>
                 <a:spcPts val="2200"/>
@@ -4773,10 +4789,12 @@
             </a:r>
           </a:p>
           <a:p>
-            <a:pPr>
+            <a:pPr lvl="0" marL="457200" indent="-228600">
+              <a:buFont typeface="Calibri"/>
               <a:spcAft>
                 <a:spcPts val="1000"/>
               </a:spcAft>
+              <a:buSzPct val="100000"/>
               <a:buChar char="•"/>
               <a:lnSpc>
                 <a:spcPts val="2200"/>
@@ -4793,10 +4811,12 @@
             </a:r>
           </a:p>
           <a:p>
-            <a:pPr>
+            <a:pPr lvl="0" marL="457200" indent="-228600">
+              <a:buFont typeface="Calibri"/>
               <a:spcAft>
                 <a:spcPts val="1000"/>
               </a:spcAft>
+              <a:buSzPct val="100000"/>
               <a:buChar char="•"/>
               <a:lnSpc>
                 <a:spcPts val="2200"/>
@@ -4932,10 +4952,12 @@
           </a:bodyPr>
           <a:lstStyle/>
           <a:p>
-            <a:pPr>
+            <a:pPr lvl="0" marL="457200" indent="-228600">
+              <a:buFont typeface="Calibri"/>
               <a:spcAft>
                 <a:spcPts val="1000"/>
               </a:spcAft>
+              <a:buSzPct val="100000"/>
               <a:buChar char="•"/>
               <a:lnSpc>
                 <a:spcPts val="2200"/>
@@ -4952,10 +4974,12 @@
             </a:r>
           </a:p>
           <a:p>
-            <a:pPr>
+            <a:pPr lvl="0" marL="457200" indent="-228600">
+              <a:buFont typeface="Calibri"/>
               <a:spcAft>
                 <a:spcPts val="1000"/>
               </a:spcAft>
+              <a:buSzPct val="100000"/>
               <a:buChar char="•"/>
               <a:lnSpc>
                 <a:spcPts val="2200"/>
@@ -4972,10 +4996,12 @@
             </a:r>
           </a:p>
           <a:p>
-            <a:pPr>
+            <a:pPr lvl="0" marL="457200" indent="-228600">
+              <a:buFont typeface="Calibri"/>
               <a:spcAft>
                 <a:spcPts val="1000"/>
               </a:spcAft>
+              <a:buSzPct val="100000"/>
               <a:buChar char="•"/>
               <a:lnSpc>
                 <a:spcPts val="2200"/>
@@ -4992,10 +5018,12 @@
             </a:r>
           </a:p>
           <a:p>
-            <a:pPr>
+            <a:pPr lvl="0" marL="457200" indent="-228600">
+              <a:buFont typeface="Calibri"/>
               <a:spcAft>
                 <a:spcPts val="1000"/>
               </a:spcAft>
+              <a:buSzPct val="100000"/>
               <a:buChar char="•"/>
               <a:lnSpc>
                 <a:spcPts val="2200"/>
@@ -5012,10 +5040,12 @@
             </a:r>
           </a:p>
           <a:p>
-            <a:pPr>
+            <a:pPr lvl="0" marL="457200" indent="-228600">
+              <a:buFont typeface="Calibri"/>
               <a:spcAft>
                 <a:spcPts val="1000"/>
               </a:spcAft>
+              <a:buSzPct val="100000"/>
               <a:buChar char="•"/>
               <a:lnSpc>
                 <a:spcPts val="2200"/>
@@ -5462,10 +5492,12 @@
           </a:bodyPr>
           <a:lstStyle/>
           <a:p>
-            <a:pPr>
+            <a:pPr lvl="0" marL="457200" indent="-228600">
+              <a:buFont typeface="Calibri"/>
               <a:spcAft>
                 <a:spcPts val="1000"/>
               </a:spcAft>
+              <a:buSzPct val="100000"/>
               <a:buChar char="•"/>
               <a:lnSpc>
                 <a:spcPts val="2200"/>
@@ -5482,10 +5514,12 @@
             </a:r>
           </a:p>
           <a:p>
-            <a:pPr>
+            <a:pPr lvl="0" marL="457200" indent="-228600">
+              <a:buFont typeface="Calibri"/>
               <a:spcAft>
                 <a:spcPts val="1000"/>
               </a:spcAft>
+              <a:buSzPct val="100000"/>
               <a:buChar char="•"/>
               <a:lnSpc>
                 <a:spcPts val="2200"/>
@@ -5502,10 +5536,12 @@
             </a:r>
           </a:p>
           <a:p>
-            <a:pPr>
+            <a:pPr lvl="0" marL="457200" indent="-228600">
+              <a:buFont typeface="Calibri"/>
               <a:spcAft>
                 <a:spcPts val="1000"/>
               </a:spcAft>
+              <a:buSzPct val="100000"/>
               <a:buChar char="•"/>
               <a:lnSpc>
                 <a:spcPts val="2200"/>
@@ -5522,10 +5558,12 @@
             </a:r>
           </a:p>
           <a:p>
-            <a:pPr>
+            <a:pPr lvl="0" marL="457200" indent="-228600">
+              <a:buFont typeface="Calibri"/>
               <a:spcAft>
                 <a:spcPts val="1000"/>
               </a:spcAft>
+              <a:buSzPct val="100000"/>
               <a:buChar char="•"/>
               <a:lnSpc>
                 <a:spcPts val="2200"/>
@@ -5661,10 +5699,12 @@
           </a:bodyPr>
           <a:lstStyle/>
           <a:p>
-            <a:pPr>
+            <a:pPr lvl="0" marL="457200" indent="-228600">
+              <a:buFont typeface="Calibri"/>
               <a:spcAft>
                 <a:spcPts val="1000"/>
               </a:spcAft>
+              <a:buSzPct val="100000"/>
               <a:buChar char="•"/>
               <a:lnSpc>
                 <a:spcPts val="2200"/>
@@ -5681,10 +5721,12 @@
             </a:r>
           </a:p>
           <a:p>
-            <a:pPr>
+            <a:pPr lvl="0" marL="457200" indent="-228600">
+              <a:buFont typeface="Calibri"/>
               <a:spcAft>
                 <a:spcPts val="1000"/>
               </a:spcAft>
+              <a:buSzPct val="100000"/>
               <a:buChar char="•"/>
               <a:lnSpc>
                 <a:spcPts val="2200"/>
@@ -5701,10 +5743,12 @@
             </a:r>
           </a:p>
           <a:p>
-            <a:pPr>
+            <a:pPr lvl="0" marL="457200" indent="-228600">
+              <a:buFont typeface="Calibri"/>
               <a:spcAft>
                 <a:spcPts val="1000"/>
               </a:spcAft>
+              <a:buSzPct val="100000"/>
               <a:buChar char="•"/>
               <a:lnSpc>
                 <a:spcPts val="2200"/>
@@ -5840,10 +5884,12 @@
           </a:bodyPr>
           <a:lstStyle/>
           <a:p>
-            <a:pPr>
+            <a:pPr lvl="0" marL="457200" indent="-228600">
+              <a:buFont typeface="Calibri"/>
               <a:spcAft>
                 <a:spcPts val="1000"/>
               </a:spcAft>
+              <a:buSzPct val="100000"/>
               <a:buChar char="•"/>
               <a:lnSpc>
                 <a:spcPts val="2200"/>
@@ -5860,10 +5906,12 @@
             </a:r>
           </a:p>
           <a:p>
-            <a:pPr>
+            <a:pPr lvl="0" marL="457200" indent="-228600">
+              <a:buFont typeface="Calibri"/>
               <a:spcAft>
                 <a:spcPts val="1000"/>
               </a:spcAft>
+              <a:buSzPct val="100000"/>
               <a:buChar char="•"/>
               <a:lnSpc>
                 <a:spcPts val="2200"/>
@@ -5880,10 +5928,12 @@
             </a:r>
           </a:p>
           <a:p>
-            <a:pPr>
+            <a:pPr lvl="0" marL="457200" indent="-228600">
+              <a:buFont typeface="Calibri"/>
               <a:spcAft>
                 <a:spcPts val="1000"/>
               </a:spcAft>
+              <a:buSzPct val="100000"/>
               <a:buChar char="•"/>
               <a:lnSpc>
                 <a:spcPts val="2200"/>
